--- a/parallax/deliverables/IntelliFix_Final_Presentation.pptx
+++ b/parallax/deliverables/IntelliFix_Final_Presentation.pptx
@@ -121,7 +121,7 @@
   <p:extLst>
     <p:ext uri="{521415D9-36F7-43E2-AB2F-B90AF26B5E84}">
       <p14:sectionLst xmlns:p14="http://schemas.microsoft.com/office/powerpoint/2010/main">
-        <p14:section name="Problem and approach" id="{d1af4de7-665b-b5af-f4dd-94972ad2bc58}">
+        <p14:section name="Problem and approach" id="{92595d75-76ff-c679-8518-b6d3bc823a48}">
           <p14:sldIdLst>
             <p14:sldId id="256"/>
             <p14:sldId id="257"/>
@@ -129,7 +129,7 @@
             <p14:sldId id="259"/>
           </p14:sldIdLst>
         </p14:section>
-        <p14:section name="How it works" id="{46014cf1-92bf-87bf-6283-b2dca8723dbd}">
+        <p14:section name="How it works" id="{3cd6b940-23ae-8186-7d9e-dc73a2866c00}">
           <p14:sldIdLst>
             <p14:sldId id="260"/>
             <p14:sldId id="261"/>
@@ -139,19 +139,19 @@
             <p14:sldId id="265"/>
           </p14:sldIdLst>
         </p14:section>
-        <p14:section name="Evidence and honesty" id="{b1e25426-bbea-8e82-c628-f99982ae7e45}">
+        <p14:section name="Evidence and honesty" id="{f13375d7-8332-1239-6aab-5eadd80981ab}">
           <p14:sldIdLst>
             <p14:sldId id="266"/>
             <p14:sldId id="267"/>
             <p14:sldId id="268"/>
           </p14:sldIdLst>
         </p14:section>
-        <p14:section name="Live demo" id="{4449e5b5-943b-a8f1-59a0-e3c0dc7feb53}">
+        <p14:section name="Live demo" id="{464deff0-1172-f9a4-f111-6a8a9f5cc814}">
           <p14:sldIdLst>
             <p14:sldId id="269"/>
           </p14:sldIdLst>
         </p14:section>
-        <p14:section name="Conclusion" id="{4d2783c1-c459-c3d6-89c0-4a0199aa9952}">
+        <p14:section name="Conclusion" id="{2e96d394-b58a-b3c2-9858-a958bc5f5288}">
           <p14:sldIdLst>
             <p14:sldId id="270"/>
           </p14:sldIdLst>
@@ -1172,9 +1172,9 @@
           <a:p>
             <a:r>
               <a:rPr lang="en-US" dirty="0"/>
-              <a:t>[Speaker: Goutam Jayasingh · about 0.5 min · demo: Browser open on the Code workbench, compiler badge green.]
+              <a:t>[Speaker: Goutam Jayasingh · about 0.5 min · demo: Browser open on the Workspace, compiler badge green.]
 Good morning. We are presenting IntelliFix: an intelligent compiler for syntax error analysis, detection and correction, for a small C-like teaching language called MiniC. I am Goutam Jayasingh, and with me are S Charumeena and Raguraman Govindasamy. We will show the problem, how the system works, a live demo on the real compiler, and how we measured it — including what did not work.
-Technical detail: Native C++17 compiler (Flex + Bison), FastAPI backend, React workbench; everything shown comes from the real compiler.
+Technical detail: Native C++17 compiler (Flex + Bison), FastAPI backend, React interface (Workspace, AST Explorer, Research &amp; Method); everything shown comes from the real compiler.
 Transition: Let us start with the problem every programmer has met.</a:t>
             </a:r>
             <a:endParaRPr lang="en-US" dirty="0"/>
@@ -1263,7 +1263,7 @@
           <a:p>
             <a:r>
               <a:rPr lang="en-US" dirty="0"/>
-              <a:t>[Speaker: S Charumeena · about 1.25 min · demo: Workbench: int x = 1 (no ;) → Analyze → Show a hint ×3 → I'll try it → type ; → Check my fix.]
+              <a:t>[Speaker: S Charumeena · about 1.25 min · demo: Workspace: int x = 1 (no ;) → Analyze → Show a hint ×3 → I'll try it → type ; → Check my fix.]
 Every analysis starts with a plain-language answer. For a valid program it summarises what the program contains and says that valid syntax does not mean correct behaviour. For errors it says where the parser stopped, what MiniC expects there in words, and why the cause may be on an earlier line. When there are several errors it explains which report to trust first. Students can ask for hints step by step — where, then what is expected, then the possible fixes — and try their own fix; the real compiler checks it.
 Technical detail: Explanations are pure functions over the compiler response; tested on all 88 professor-style inputs (102 unit tests); every result state has its own wording, including empty input, unsupported C and the nesting limit.
 Transition: Raguraman will now show how we measured the system.
@@ -1356,7 +1356,7 @@
           <a:p>
             <a:r>
               <a:rPr lang="en-US" dirty="0"/>
-              <a:t>[Speaker: Raguraman Govindasamy · about 1.5 min · demo: Evaluation &amp; impact page.]
+              <a:t>[Speaker: Raguraman Govindasamy · about 1.5 min · demo: Research &amp; Method → sections 3–4.]
 We wrote 30 valid MiniC programs and generated 900 seeded mutations with one or two errors. We split by program: 360 cases for development and 540 held out for testing, so near-duplicates cannot leak. On the test set the top-ranked repair restored the original program's syntax tree in 71.5 percent of cases, against 55.2 percent for a least-cost repair over the same candidates, and about 48 percent for CPCT+. The first edit was at the exact mistake in 86.7 percent of cases. These are synthetic errors, not real student code.
 Technical detail: Top-1 71.5% [67.5, 75.1]; paired difference vs least-cost +16.3 points [13.1, 19.4]; CPCT+ 47.4–49.1% over three runs (non-deterministic ties); Wilson intervals, paired bootstrap.
 Transition: Just as important: what helped, and what did not.
@@ -1449,7 +1449,7 @@
           <a:p>
             <a:r>
               <a:rPr lang="en-US" dirty="0"/>
-              <a:t>[Speaker: Raguraman Govindasamy · about 1.25 min · demo: Evaluation page → caveat rows.]
+              <a:t>[Speaker: Raguraman Govindasamy · about 1.25 min · demo: Research &amp; Method → section 5 (ablation) and 6 (limitations).]
 Removing layout evidence drops accuracy from 71.5 to 62.6 percent, so layout matters. Abstention cuts wrong answers presented as confident from 28.5 to 6.1 percent of all cases, while still recommending in 50.7 percent; of those recommendations 88 percent were correct. But the stability evidence gave no measurable gain, grouping helped only a little, and our risk target was missed: 12 percent instead of 10. For the new question feature we only have a simulation: when IntelliFix abstains, the correct repair is among the offered options in 153 of 256 cases. Real usability is not yet measured.
 Technical detail: Stability +0.2 points, CI [−0.4, 0.9]; grouping coverage 50.7% vs 48.9%; clarification bound from stored top-3 results (evaluation/experiments/clarification_bound.py), labelled as simulation.
 Transition: How do we know it behaves on unexpected input?
@@ -1727,7 +1727,7 @@
           <a:p>
             <a:r>
               <a:rPr lang="en-US" dirty="0"/>
-              <a:t>[Speaker: Raguraman Govindasamy · about 1 min · demo: Workbench cleared, ready for questions.]
+              <a:t>[Speaker: Raguraman Govindasamy · about 1 min · demo: Workspace cleared, ready for questions.]
 Our contribution is not a new algorithm. It is an integrated, inspectable pipeline that adds layout evidence, interpretable ranking, structural grouping, abstention and interactive clarification to known LR repair techniques, with explanations and an AST explorer for beginners, and an honest evaluation. Next we want to test it with real student errors, run a user study of the question feature, learn the weights from real data, and verify the Windows build natively. Thank you — we are happy to take questions.
 Technical detail: Supported: ranking +16.3, layout +8.9, abstention −22.4 points wrong-confident. Not supported: stability. Not measured: usability.
 Transition: Questions.
@@ -1820,7 +1820,7 @@
           <a:p>
             <a:r>
               <a:rPr lang="en-US" dirty="0"/>
-              <a:t>[Speaker: Goutam Jayasingh · about 1 min · demo: Workbench → sample Missing semicolon → Run parser.]
+              <a:t>[Speaker: Goutam Jayasingh · about 1 min · demo: Workspace → sample Missing semicolon → Analyze → step 2 Diagnosis (lexer → parser panel).]
 In this program the semicolon is missing at the end of line 3, but the parser complains about line 4. An LR parser only notices a problem at the first token that cannot continue any valid program, so the detection point and the real mistake are different places. Second problem: many edits make the program parse. Replacing int on line 4 with a comma also gives valid code. A tool that silently picks one can be confidently wrong, and a beginner cannot tell.
 Technical detail: Correct-prefix property of LR parsing; the error is detected at 4:3 (token int, LR state 47); the edit that restores the original is at 3:16.
 Transition: So what exactly did we set out to build?
@@ -2006,7 +2006,7 @@
           <a:p>
             <a:r>
               <a:rPr lang="en-US" dirty="0"/>
-              <a:t>[Speaker: Goutam Jayasingh · about 1 min · demo: Overview page → processing pipeline.]
+              <a:t>[Speaker: Goutam Jayasingh · about 1 min · demo: Research &amp; Method → section 2 (how IntelliFix works).]
 The browser sends your code to a FastAPI backend, which runs the native compiler, parallaxc, as a separate process for every request and passes its JSON back. The compiler runs eight stages: lex, parse, localise the first error, generate and validate candidates, rank and group them, follow later errors in hypothesis lanes, and decide. The interface only displays this output. If the compiler is not built, the site says so instead of showing anything fake.
 Technical detail: Subprocess per request in a worker thread with size (64 KB), time and concurrency limits; HTTP 503 COMPILER_UNAVAILABLE when the binary is missing.
 Transition: Charumeena will take you inside the compiler.
@@ -2099,7 +2099,7 @@
           <a:p>
             <a:r>
               <a:rPr lang="en-US" dirty="0"/>
-              <a:t>[Speaker: S Charumeena · about 1.25 min · demo: Grammar &amp; parsing page (state 47); Repair laboratory → Rejected tab.]
+              <a:t>[Speaker: S Charumeena · about 1.25 min · demo: Workspace step 2 → Compiler internals → Parser state (state 47); All candidates → Rejected tab.]
 The Flex lexer turns text into tokens with exact positions and reports bad characters as error tokens instead of crashing. The Bison parser uses LAC, lookahead correction, which makes the list of expected tokens at an error exact — here 15 tokens. The repair engine tries insert, delete and replace edits near the error using only those tokens, plus layout edits such as a semicolon at a line end. For this example it generated 60 candidates; the real parser accepted 3. Every accepted fix is written back as text with your own spacing, re-lexed and re-parsed.
 Technical detail: Window of the error token and 3 before; acceptance = full parse or ≥ 3 tokens of progress; two-edit search only if no single edit works; round-trip validation.
 Transition: When several fixes parse, how does IntelliFix decide — and what if it cannot?
@@ -2192,7 +2192,7 @@
           <a:p>
             <a:r>
               <a:rPr lang="en-US" dirty="0"/>
-              <a:t>[Speaker: S Charumeena · about 1.25 min · demo: Workbench: type int total = price + ; → Analyze → answer the question.]
+              <a:t>[Speaker: S Charumeena · about 1.25 min · demo: Workspace: sample Missing expression after + → Analyze → step 3 Fixes → answer the question.]
 For int total = price plus semicolon, an expression is missing after the plus. The engine finds several fixes with similar evidence, so instead of guessing it asks: delete the plus, replace it, or type the missing expression yourself. It suggests price, a name declared earlier, but not total, which is still being declared. Your answer is checked by the real parser before you can apply it; applying re-analyzes the program, and Undo brings the original back. IntelliFix never invents a missing value.
 Technical detail: Options are the decision's real top plans; placeholder edits become a fill-in box; suggestions come from lexer tokens (declared before the error, excluding the declaration in progress); validation via /api/parse.
 Transition: The same evidence also lets you compare repairs side by side.
@@ -2286,7 +2286,7 @@
           <a:p>
             <a:r>
               <a:rPr lang="en-US" dirty="0"/>
-              <a:t>[Speaker: S Charumeena · about 1.25 min · demo: Repair laboratory → Evidence breakdown; workbench → Compare the repairs.]
+              <a:t>[Speaker: S Charumeena · about 1.25 min · demo: Workspace step 3 Fixes → option cards → Why this score; Compiler internals → All candidates for the full evidence.]
 Each accepted candidate gets a score from 13 named pieces of evidence. Inserting the semicolon costs minus one, makes the whole program parse, plus two, and lands exactly at a line break, plus 0.75: total 1.75. Replacing int with a comma costs more and overwrites a keyword you wrote: minus 0.25. The best leads by 2.0, above our threshold of 1.5, so it is recommended. The score only ranks; it is not a probability, and parsing does not prove the meaning is right.
 Technical detail: Weights set on the development split and frozen before testing; candidates with the same canonical AST form one class; margin = best class − second class; τ = 1.5 chosen on dev.
 Transition: Next, the structure itself: the AST.
@@ -2380,7 +2380,7 @@
           <a:p>
             <a:r>
               <a:rPr lang="en-US" dirty="0"/>
-              <a:t>[Speaker: S Charumeena · about 1.25 min · demo: AST explorer → click the Binary * node; search for fact.]
+              <a:t>[Speaker: S Charumeena · about 1.25 min · demo: AST Explorer → click the Binary + node, then click a ; in the code; search for square.]
 Our professor asked for an AST that beginners can understand, so every node explains itself. Click a node and you see what it represents, a plain-English sentence — here “the operator times multiplies its left and right values” — its role in its parent, what each child means, the exact source code it came from, highlighted in the editor, and what changed after a repair. You can search the tree and expand or collapse it. Everything comes from the compiler's real AST.
 Technical detail: AST from Bison actions (arena, canonical form, FNV-1a hash); explanations for all 26 node kinds; source spans in UTF-8 byte offsets mapped to the editor.
 Transition: What happens to the tree when the code is broken, or after a repair?
@@ -2473,7 +2473,7 @@
           <a:p>
             <a:r>
               <a:rPr lang="en-US" dirty="0"/>
-              <a:t>[Speaker: S Charumeena · about 1 min · demo: Ambiguous operator sample → AST explorer → Before &amp; after → Compare.]
+              <a:t>[Speaker: S Charumeena · about 1 min · demo: Ambiguous operator sample → Analyze → AST Explorer → Before &amp; after.]
 Code with a syntax error has no complete AST, and we do not fake one: the explorer shows the partial tree the parser built while recovering, with Error nodes where it skipped text, and clearly labelled. It can also show the real AST of the top-ranked repair. To compare structures, both programs are parsed again; here, plan 1 inserts plus and plan 2 inserts minus, and the comparison marks exactly one changed node: the Binary operator.
 Technical detail: Structural diff aligns children by LCS over canonical subtrees; marks only where kind and span match; no diff is claimed when either side is invalid.
 Transition: All of this is wrapped in explanations for beginners.
@@ -3332,18 +3332,18 @@
       </p:sp>
       <p:sp>
         <p:nvSpPr>
-          <p:cNvPr id="6" name="Workbench screenshot (actual output) frame"/>
+          <p:cNvPr id="6" name="Workspace screenshot (actual output) frame"/>
           <p:cNvSpPr/>
           <p:nvPr/>
         </p:nvSpPr>
         <p:spPr>
           <a:xfrm>
             <a:off x="5358384" y="923544"/>
-            <a:ext cx="3364992" cy="2311603"/>
+            <a:ext cx="3364992" cy="4100170"/>
           </a:xfrm>
           <a:prstGeom prst="roundRect">
             <a:avLst>
-              <a:gd name="adj" fmla="val 3165"/>
+              <a:gd name="adj" fmla="val 2174"/>
             </a:avLst>
           </a:prstGeom>
           <a:solidFill>
@@ -3366,7 +3366,7 @@
       </p:sp>
       <p:pic>
         <p:nvPicPr>
-          <p:cNvPr id="7" name="Workbench screenshot (actual output)" descr="Workbench screenshot (actual output)">    </p:cNvPr>
+          <p:cNvPr id="7" name="Workspace screenshot (actual output)" descr="Workspace screenshot (actual output)">    </p:cNvPr>
           <p:cNvPicPr>
             <a:picLocks noChangeAspect="1"/>
           </p:cNvPicPr>
@@ -3381,7 +3381,7 @@
         <p:spPr>
           <a:xfrm>
             <a:off x="5394960" y="960120"/>
-            <a:ext cx="3291840" cy="2238451"/>
+            <a:ext cx="3291840" cy="4027018"/>
           </a:xfrm>
           <a:prstGeom prst="rect">
             <a:avLst/>
@@ -3463,11 +3463,11 @@
         <p:spPr>
           <a:xfrm>
             <a:off x="420624" y="1014984"/>
-            <a:ext cx="3182112" cy="2820605"/>
+            <a:ext cx="2440732" cy="3502152"/>
           </a:xfrm>
           <a:prstGeom prst="roundRect">
             <a:avLst>
-              <a:gd name="adj" fmla="val 2593"/>
+              <a:gd name="adj" fmla="val 2997"/>
             </a:avLst>
           </a:prstGeom>
           <a:solidFill>
@@ -3505,7 +3505,7 @@
         <p:spPr>
           <a:xfrm>
             <a:off x="457200" y="1051560"/>
-            <a:ext cx="3108960" cy="2747453"/>
+            <a:ext cx="2367580" cy="3429000"/>
           </a:xfrm>
           <a:prstGeom prst="rect">
             <a:avLst/>
@@ -3520,7 +3520,7 @@
         </p:nvSpPr>
         <p:spPr>
           <a:xfrm>
-            <a:off x="457200" y="3863021"/>
+            <a:off x="457200" y="4544568"/>
             <a:ext cx="3200400" cy="274320"/>
           </a:xfrm>
           <a:prstGeom prst="rect">
@@ -7042,7 +7042,7 @@
                           <a:ea typeface="Calibri" pitchFamily="34" charset="-122"/>
                           <a:cs typeface="Calibri" pitchFamily="34" charset="-120"/>
                         </a:rPr>
-                        <a:t>132 / 132</a:t>
+                        <a:t>219 / 219</a:t>
                       </a:r>
                       <a:endParaRPr lang="en-US" sz="1200" dirty="0">
                         <a:latin typeface="Calibri" charset="0"/>
@@ -7174,7 +7174,7 @@
                           <a:ea typeface="Calibri" pitchFamily="34" charset="-122"/>
                           <a:cs typeface="Calibri" pitchFamily="34" charset="-120"/>
                         </a:rPr>
-                        <a:t>17 / 17</a:t>
+                        <a:t>15 / 15</a:t>
                       </a:r>
                       <a:endParaRPr lang="en-US" sz="1200" dirty="0">
                         <a:latin typeface="Calibri" charset="0"/>
@@ -7684,18 +7684,18 @@
       </p:sp>
       <p:sp>
         <p:nvSpPr>
-          <p:cNvPr id="4" name="Workbench during the demo (actual output) frame"/>
+          <p:cNvPr id="4" name="Workspace step 4 during the demo (actual output) frame"/>
           <p:cNvSpPr/>
           <p:nvPr/>
         </p:nvSpPr>
         <p:spPr>
           <a:xfrm>
             <a:off x="420624" y="1014984"/>
-            <a:ext cx="4914093" cy="3364992"/>
+            <a:ext cx="3153843" cy="3364992"/>
           </a:xfrm>
           <a:prstGeom prst="roundRect">
             <a:avLst>
-              <a:gd name="adj" fmla="val 2174"/>
+              <a:gd name="adj" fmla="val 2319"/>
             </a:avLst>
           </a:prstGeom>
           <a:solidFill>
@@ -7718,7 +7718,7 @@
       </p:sp>
       <p:pic>
         <p:nvPicPr>
-          <p:cNvPr id="5" name="Workbench during the demo (actual output)" descr="Workbench during the demo (actual output)">    </p:cNvPr>
+          <p:cNvPr id="5" name="Workspace step 4 during the demo (actual output)" descr="Workspace step 4 during the demo (actual output)">    </p:cNvPr>
           <p:cNvPicPr>
             <a:picLocks noChangeAspect="1"/>
           </p:cNvPicPr>
@@ -7733,7 +7733,7 @@
         <p:spPr>
           <a:xfrm>
             <a:off x="457200" y="1051560"/>
-            <a:ext cx="4840941" cy="3291840"/>
+            <a:ext cx="3080691" cy="3291840"/>
           </a:xfrm>
           <a:prstGeom prst="rect">
             <a:avLst/>
@@ -7778,7 +7778,7 @@
                 <a:ea typeface="Calibri" pitchFamily="34" charset="-122"/>
                 <a:cs typeface="Calibri" pitchFamily="34" charset="-120"/>
               </a:rPr>
-              <a:t>Missing semicolon → Analyze: explanation and recommended fix</a:t>
+              <a:t>Missing semicolon: Analyze → Diagnosis → Fixes → Apply &amp; verify</a:t>
             </a:r>
             <a:endParaRPr lang="en-US" sz="1300" dirty="0"/>
           </a:p>
@@ -7800,7 +7800,7 @@
                 <a:ea typeface="Calibri" pitchFamily="34" charset="-122"/>
                 <a:cs typeface="Calibri" pitchFamily="34" charset="-120"/>
               </a:rPr>
-              <a:t>int total = price + ; → answer the question</a:t>
+              <a:t>int total = price + ; → answer the question in step 3</a:t>
             </a:r>
             <a:endParaRPr lang="en-US" sz="1300" dirty="0"/>
           </a:p>
@@ -7822,7 +7822,7 @@
                 <a:ea typeface="Calibri" pitchFamily="34" charset="-122"/>
                 <a:cs typeface="Calibri" pitchFamily="34" charset="-120"/>
               </a:rPr>
-              <a:t>AST explorer: click a node, search</a:t>
+              <a:t>Step 4: partial tree → complete tree</a:t>
             </a:r>
             <a:endParaRPr lang="en-US" sz="1300" dirty="0"/>
           </a:p>
@@ -7844,7 +7844,7 @@
                 <a:ea typeface="Calibri" pitchFamily="34" charset="-122"/>
                 <a:cs typeface="Calibri" pitchFamily="34" charset="-120"/>
               </a:rPr>
-              <a:t>Ambiguous operator → Before &amp; after</a:t>
+              <a:t>AST Explorer: click a node or the code</a:t>
             </a:r>
             <a:endParaRPr lang="en-US" sz="1300" dirty="0"/>
           </a:p>
@@ -11243,11 +11243,11 @@
         <p:spPr>
           <a:xfrm>
             <a:off x="420624" y="1014984"/>
-            <a:ext cx="3364992" cy="3403269"/>
+            <a:ext cx="3073080" cy="3502152"/>
           </a:xfrm>
           <a:prstGeom prst="roundRect">
             <a:avLst>
-              <a:gd name="adj" fmla="val 2174"/>
+              <a:gd name="adj" fmla="val 2380"/>
             </a:avLst>
           </a:prstGeom>
           <a:solidFill>
@@ -11285,7 +11285,7 @@
         <p:spPr>
           <a:xfrm>
             <a:off x="457200" y="1051560"/>
-            <a:ext cx="3291840" cy="3330117"/>
+            <a:ext cx="2999928" cy="3429000"/>
           </a:xfrm>
           <a:prstGeom prst="rect">
             <a:avLst/>
@@ -11300,7 +11300,7 @@
         </p:nvSpPr>
         <p:spPr>
           <a:xfrm>
-            <a:off x="457200" y="4445685"/>
+            <a:off x="457200" y="4544568"/>
             <a:ext cx="3108960" cy="274320"/>
           </a:xfrm>
           <a:prstGeom prst="rect">
@@ -11391,7 +11391,7 @@
                 <a:ea typeface="Calibri" pitchFamily="34" charset="-122"/>
                 <a:cs typeface="Calibri" pitchFamily="34" charset="-120"/>
               </a:rPr>
-              <a:t>It asks: delete +, replace + with ;, or type the missing expression — options are the real top plans.</a:t>
+              <a:t>It explains what is ambiguous and asks: is the + extra, or is something missing? Options are the real top plans, a fill-in, or your own line.</a:t>
             </a:r>
             <a:endParaRPr lang="en-US" sz="1350" dirty="0"/>
           </a:p>
@@ -11457,7 +11457,7 @@
                 <a:ea typeface="Calibri" pitchFamily="34" charset="-122"/>
                 <a:cs typeface="Calibri" pitchFamily="34" charset="-120"/>
               </a:rPr>
-              <a:t>Apply re-analyzes the program; Undo restores the original; you can also leave it unresolved.</a:t>
+              <a:t>Then: inspect the tree (step 4), apply and verify by a real re-parse (step 5); Undo restores the original; you can also leave it unresolved.</a:t>
             </a:r>
             <a:endParaRPr lang="en-US" sz="1350" dirty="0"/>
           </a:p>
@@ -13760,7 +13760,7 @@
                 <a:ea typeface="Calibri" pitchFamily="34" charset="-122"/>
                 <a:cs typeface="Calibri" pitchFamily="34" charset="-120"/>
               </a:rPr>
-              <a:t>The workbench lists every structurally different repair with its edits, cost and parser validity, and a “Use this” button. The score ranks; it is not a probability.</a:t>
+              <a:t>Step 3 (Fixes) shows every structurally different repair with its line change, cost, score and parser validity, and “Choose this fix”. The score ranks; it is not a probability.</a:t>
             </a:r>
             <a:endParaRPr lang="en-US" sz="1100" dirty="0"/>
           </a:p>
@@ -13882,14 +13882,14 @@
       </p:sp>
       <p:sp>
         <p:nvSpPr>
-          <p:cNvPr id="4" name="AST explorer with an explained node (actual output) frame"/>
+          <p:cNvPr id="4" name="AST Explorer with an explained node (actual output) frame"/>
           <p:cNvSpPr/>
           <p:nvPr/>
         </p:nvSpPr>
         <p:spPr>
           <a:xfrm>
             <a:off x="420624" y="1014984"/>
-            <a:ext cx="5115799" cy="3502152"/>
+            <a:ext cx="4078993" cy="3502152"/>
           </a:xfrm>
           <a:prstGeom prst="roundRect">
             <a:avLst>
@@ -13916,7 +13916,7 @@
       </p:sp>
       <p:pic>
         <p:nvPicPr>
-          <p:cNvPr id="5" name="AST explorer with an explained node (actual output)" descr="AST explorer with an explained node (actual output)">    </p:cNvPr>
+          <p:cNvPr id="5" name="AST Explorer with an explained node (actual output)" descr="AST Explorer with an explained node (actual output)">    </p:cNvPr>
           <p:cNvPicPr>
             <a:picLocks noChangeAspect="1"/>
           </p:cNvPicPr>
@@ -13931,7 +13931,7 @@
         <p:spPr>
           <a:xfrm>
             <a:off x="457200" y="1051560"/>
-            <a:ext cx="5042647" cy="3429000"/>
+            <a:ext cx="4005841" cy="3429000"/>
           </a:xfrm>
           <a:prstGeom prst="rect">
             <a:avLst/>
@@ -13971,7 +13971,7 @@
                 <a:ea typeface="Calibri" pitchFamily="34" charset="-122"/>
                 <a:cs typeface="Calibri" pitchFamily="34" charset="-120"/>
               </a:rPr>
-              <a:t>Actual output: the Binary * node of n * fact(n - 1)</a:t>
+              <a:t>Actual output: the Binary + node of total + square(i) * 2</a:t>
             </a:r>
             <a:endParaRPr lang="en-US" sz="1050" dirty="0"/>
           </a:p>
@@ -14054,7 +14054,7 @@
                 <a:ea typeface="Calibri" pitchFamily="34" charset="-122"/>
                 <a:cs typeface="Calibri" pitchFamily="34" charset="-120"/>
               </a:rPr>
-              <a:t>What it represents</a:t>
+              <a:t>Its meaning and category</a:t>
             </a:r>
             <a:endParaRPr lang="en-US" sz="1300" dirty="0"/>
           </a:p>
@@ -14076,7 +14076,7 @@
                 <a:ea typeface="Calibri" pitchFamily="34" charset="-122"/>
                 <a:cs typeface="Calibri" pitchFamily="34" charset="-120"/>
               </a:rPr>
-              <a:t>What it means in plain English</a:t>
+              <a:t>Its role in the parent and each child</a:t>
             </a:r>
             <a:endParaRPr lang="en-US" sz="1300" dirty="0"/>
           </a:p>
@@ -14098,7 +14098,7 @@
                 <a:ea typeface="Calibri" pitchFamily="34" charset="-122"/>
                 <a:cs typeface="Calibri" pitchFamily="34" charset="-120"/>
               </a:rPr>
-              <a:t>Its role in the parent node</a:t>
+              <a:t>The source it covers (click code ↔ node)</a:t>
             </a:r>
             <a:endParaRPr lang="en-US" sz="1300" dirty="0"/>
           </a:p>
@@ -14120,7 +14120,7 @@
                 <a:ea typeface="Calibri" pitchFamily="34" charset="-122"/>
                 <a:cs typeface="Calibri" pitchFamily="34" charset="-120"/>
               </a:rPr>
-              <a:t>What each child is</a:t>
+              <a:t>The tokens it absorbs (;  (  )  op)</a:t>
             </a:r>
             <a:endParaRPr lang="en-US" sz="1300" dirty="0"/>
           </a:p>
@@ -14142,7 +14142,7 @@
                 <a:ea typeface="Calibri" pitchFamily="34" charset="-122"/>
                 <a:cs typeface="Calibri" pitchFamily="34" charset="-120"/>
               </a:rPr>
-              <a:t>The exact source code (highlighted)</a:t>
+              <a:t>The grammar rule that built it</a:t>
             </a:r>
             <a:endParaRPr lang="en-US" sz="1300" dirty="0"/>
           </a:p>
@@ -14164,7 +14164,7 @@
                 <a:ea typeface="Calibri" pitchFamily="34" charset="-122"/>
                 <a:cs typeface="Calibri" pitchFamily="34" charset="-120"/>
               </a:rPr>
-              <a:t>What changed after a repair</a:t>
+              <a:t>An expression diagram with precedence</a:t>
             </a:r>
             <a:endParaRPr lang="en-US" sz="1300" dirty="0"/>
           </a:p>
@@ -14203,7 +14203,7 @@
                 <a:ea typeface="Calibri" pitchFamily="34" charset="-122"/>
                 <a:cs typeface="Calibri" pitchFamily="34" charset="-120"/>
               </a:rPr>
-              <a:t>Plus: search, expand/collapse all, JSON and text views. Explanations exist for all 26 node kinds.</a:t>
+              <a:t>Plus: search, expand/collapse, before &amp; after, JSON. Grammar rules come from minic.y for all 26 node kinds.</a:t>
             </a:r>
             <a:endParaRPr lang="en-US" sz="1100" dirty="0"/>
           </a:p>
@@ -14332,11 +14332,11 @@
         <p:spPr>
           <a:xfrm>
             <a:off x="420624" y="1014984"/>
-            <a:ext cx="3200816" cy="3273552"/>
+            <a:ext cx="4005072" cy="1044336"/>
           </a:xfrm>
           <a:prstGeom prst="roundRect">
             <a:avLst>
-              <a:gd name="adj" fmla="val 2285"/>
+              <a:gd name="adj" fmla="val 7005"/>
             </a:avLst>
           </a:prstGeom>
           <a:solidFill>
@@ -14374,7 +14374,7 @@
         <p:spPr>
           <a:xfrm>
             <a:off x="457200" y="1051560"/>
-            <a:ext cx="3127664" cy="3200400"/>
+            <a:ext cx="3931920" cy="971184"/>
           </a:xfrm>
           <a:prstGeom prst="rect">
             <a:avLst/>
@@ -14390,11 +14390,11 @@
         <p:spPr>
           <a:xfrm>
             <a:off x="4718304" y="1014984"/>
-            <a:ext cx="2615526" cy="3273552"/>
+            <a:ext cx="4005072" cy="1858244"/>
           </a:xfrm>
           <a:prstGeom prst="roundRect">
             <a:avLst>
-              <a:gd name="adj" fmla="val 2797"/>
+              <a:gd name="adj" fmla="val 3937"/>
             </a:avLst>
           </a:prstGeom>
           <a:solidFill>
@@ -14432,7 +14432,7 @@
         <p:spPr>
           <a:xfrm>
             <a:off x="4754880" y="1051560"/>
-            <a:ext cx="2542374" cy="3200400"/>
+            <a:ext cx="3931920" cy="1785092"/>
           </a:xfrm>
           <a:prstGeom prst="rect">
             <a:avLst/>
@@ -14447,7 +14447,7 @@
         </p:nvSpPr>
         <p:spPr>
           <a:xfrm>
-            <a:off x="457200" y="4315968"/>
+            <a:off x="457200" y="2086752"/>
             <a:ext cx="4023360" cy="274320"/>
           </a:xfrm>
           <a:prstGeom prst="rect">
@@ -14486,7 +14486,7 @@
         </p:nvSpPr>
         <p:spPr>
           <a:xfrm>
-            <a:off x="4754880" y="4315968"/>
+            <a:off x="4754880" y="2900660"/>
             <a:ext cx="4023360" cy="274320"/>
           </a:xfrm>
           <a:prstGeom prst="rect">
@@ -14511,7 +14511,7 @@
                 <a:ea typeface="Calibri" pitchFamily="34" charset="-122"/>
                 <a:cs typeface="Calibri" pitchFamily="34" charset="-120"/>
               </a:rPr>
-              <a:t>Plan 1 (+) vs plan 2 (−): exactly one changed node, from the compiler's diff</a:t>
+              <a:t>Option 1 (+) vs option 2 (−): exactly one changed node, from the compiler's diff</a:t>
             </a:r>
             <a:endParaRPr lang="en-US" sz="1050" dirty="0"/>
           </a:p>
